--- a/system-design-101/vi/lessons/sd-01-032/slides/sd-01-032.pptx
+++ b/system-design-101/vi/lessons/sd-01-032/slides/sd-01-032.pptx
@@ -12912,7 +12912,7 @@
         <p:spPr>
           <a:xfrm>
             <a:off x="914400" y="1390650"/>
-            <a:ext cx="16192500" cy="1143000"/>
+            <a:ext cx="16192500" cy="2047875"/>
           </a:xfrm>
           <a:prstGeom prst="rect">
             <a:avLst/>
@@ -12921,17 +12921,17 @@
           <a:ln/>
         </p:spPr>
         <p:txBody>
-          <a:bodyPr wrap="square" lIns="0" tIns="51027" rIns="0" bIns="-51027" rtlCol="0" anchor="t"/>
+          <a:bodyPr wrap="square" lIns="0" tIns="61341" rIns="0" bIns="-61341" rtlCol="0" anchor="t"/>
           <a:lstStyle/>
           <a:p>
             <a:pPr algn="l" indent="0" marL="0">
               <a:lnSpc>
-                <a:spcPts val="5967"/>
+                <a:spcPts val="7176"/>
               </a:lnSpc>
               <a:buNone/>
             </a:pPr>
             <a:r>
-              <a:rPr lang="en-US" sz="5738" dirty="0" spc="3" kern="0">
+              <a:rPr lang="en-US" sz="6900" dirty="0" spc="6" kern="0">
                 <a:solidFill>
                   <a:srgbClr val="14161C"/>
                 </a:solidFill>
@@ -12942,7 +12942,7 @@
               <a:t>Chọn</a:t>
             </a:r>
             <a:r>
-              <a:rPr lang="en-US" sz="5738" dirty="0" spc="8" kern="0">
+              <a:rPr lang="en-US" sz="6900" dirty="0" spc="12" kern="0">
                 <a:solidFill>
                   <a:srgbClr val="14161C"/>
                 </a:solidFill>
@@ -12953,7 +12953,7 @@
               <a:t> đúng</a:t>
             </a:r>
             <a:r>
-              <a:rPr lang="en-US" sz="5738" dirty="0" spc="-48" kern="0">
+              <a:rPr lang="en-US" sz="6900" dirty="0" spc="-58" kern="0">
                 <a:solidFill>
                   <a:srgbClr val="14161C"/>
                 </a:solidFill>
@@ -12964,7 +12964,7 @@
               <a:t> trường</a:t>
             </a:r>
             <a:r>
-              <a:rPr lang="en-US" sz="5738" dirty="0" spc="-19" kern="0">
+              <a:rPr lang="en-US" sz="6900" dirty="0" spc="-18" kern="0">
                 <a:solidFill>
                   <a:srgbClr val="14161C"/>
                 </a:solidFill>
@@ -12975,7 +12975,7 @@
               <a:t> tên</a:t>
             </a:r>
             <a:r>
-              <a:rPr lang="en-US" sz="5738" dirty="0" spc="3" kern="0">
+              <a:rPr lang="en-US" sz="6900" dirty="0" spc="0" kern="0">
                 <a:solidFill>
                   <a:srgbClr val="14161C"/>
                 </a:solidFill>
@@ -12986,7 +12986,7 @@
               <a:t> sách</a:t>
             </a:r>
             <a:r>
-              <a:rPr lang="en-US" sz="5738" dirty="0" spc="0" kern="0">
+              <a:rPr lang="en-US" sz="6900" dirty="0" spc="2" kern="0">
                 <a:solidFill>
                   <a:srgbClr val="14161C"/>
                 </a:solidFill>
@@ -12997,7 +12997,7 @@
               <a:t> theo</a:t>
             </a:r>
             <a:r>
-              <a:rPr lang="en-US" sz="5738" dirty="0" spc="4" kern="0">
+              <a:rPr lang="en-US" sz="6900" dirty="0" spc="5" kern="0">
                 <a:solidFill>
                   <a:srgbClr val="14161C"/>
                 </a:solidFill>
@@ -13008,7 +13008,7 @@
               <a:t> schema:</a:t>
             </a:r>
             <a:r>
-              <a:rPr lang="en-US" sz="5738" dirty="0" spc="-2" kern="0">
+              <a:rPr lang="en-US" sz="6900" dirty="0" spc="2" kern="0">
                 <a:solidFill>
                   <a:srgbClr val="14161C"/>
                 </a:solidFill>
@@ -13019,7 +13019,7 @@
               <a:t> thẻ</a:t>
             </a:r>
             <a:r>
-              <a:rPr lang="en-US" sz="5738" dirty="0" spc="-31" kern="0">
+              <a:rPr lang="en-US" sz="6900" dirty="0" spc="-40" kern="0">
                 <a:solidFill>
                   <a:srgbClr val="14161C"/>
                 </a:solidFill>
@@ -13029,7 +13029,7 @@
               </a:rPr>
               <a:t> nào?</a:t>
             </a:r>
-            <a:endParaRPr lang="en-US" sz="5738" dirty="0"/>
+            <a:endParaRPr lang="en-US" sz="6900" dirty="0"/>
           </a:p>
         </p:txBody>
       </p:sp>
@@ -13041,12 +13041,12 @@
         </p:nvSpPr>
         <p:spPr>
           <a:xfrm>
-            <a:off x="914400" y="3143250"/>
-            <a:ext cx="9525000" cy="5524500"/>
+            <a:off x="914400" y="3619500"/>
+            <a:ext cx="9525000" cy="5048250"/>
           </a:xfrm>
           <a:prstGeom prst="roundRect">
             <a:avLst>
-              <a:gd name="adj" fmla="val 5517"/>
+              <a:gd name="adj" fmla="val 6038"/>
             </a:avLst>
           </a:prstGeom>
           <a:solidFill>
@@ -13063,7 +13063,7 @@
         </p:nvSpPr>
         <p:spPr>
           <a:xfrm>
-            <a:off x="1428750" y="3524250"/>
+            <a:off x="1428750" y="4000500"/>
             <a:ext cx="8572500" cy="419100"/>
           </a:xfrm>
           <a:prstGeom prst="rect">
@@ -13113,7 +13113,7 @@
         </p:nvSpPr>
         <p:spPr>
           <a:xfrm>
-            <a:off x="1428750" y="4095750"/>
+            <a:off x="1428750" y="4572000"/>
             <a:ext cx="8572500" cy="1905000"/>
           </a:xfrm>
           <a:prstGeom prst="rect">
@@ -13155,7 +13155,7 @@
         </p:nvSpPr>
         <p:spPr>
           <a:xfrm>
-            <a:off x="1428750" y="6667500"/>
+            <a:off x="1428750" y="7048500"/>
             <a:ext cx="8572500" cy="1143000"/>
           </a:xfrm>
           <a:prstGeom prst="rect">
@@ -13274,12 +13274,12 @@
         </p:nvSpPr>
         <p:spPr>
           <a:xfrm>
-            <a:off x="10763250" y="3143250"/>
-            <a:ext cx="6610350" cy="5524500"/>
+            <a:off x="10763250" y="3619500"/>
+            <a:ext cx="6610350" cy="5048250"/>
           </a:xfrm>
           <a:prstGeom prst="roundRect">
             <a:avLst>
-              <a:gd name="adj" fmla="val 5517"/>
+              <a:gd name="adj" fmla="val 6038"/>
             </a:avLst>
           </a:prstGeom>
           <a:solidFill>
@@ -13301,7 +13301,7 @@
         </p:nvSpPr>
         <p:spPr>
           <a:xfrm>
-            <a:off x="11182350" y="3524250"/>
+            <a:off x="11182350" y="4000500"/>
             <a:ext cx="5810250" cy="419100"/>
           </a:xfrm>
           <a:prstGeom prst="rect">
@@ -13373,7 +13373,7 @@
         </p:nvSpPr>
         <p:spPr>
           <a:xfrm>
-            <a:off x="11182350" y="4191000"/>
+            <a:off x="11182350" y="4667250"/>
             <a:ext cx="5810250" cy="2857500"/>
           </a:xfrm>
           <a:prstGeom prst="rect">

--- a/system-design-101/vi/lessons/sd-01-032/slides/sd-01-032.pptx
+++ b/system-design-101/vi/lessons/sd-01-032/slides/sd-01-032.pptx
@@ -34,10 +34,6 @@
     <p:embeddedFont>
       <p:font typeface="Be Vietnam Pro SemiBold"/>
       <p:regular r:id="rId20"/>
-    </p:embeddedFont>
-    <p:embeddedFont>
-      <p:font typeface="Roboto Mono"/>
-      <p:bold r:id="rId21"/>
     </p:embeddedFont>
   </p:embeddedFontLst>
   <p:defaultTextStyle>
@@ -9293,7 +9289,7 @@
           <a:ln/>
         </p:spPr>
         <p:txBody>
-          <a:bodyPr wrap="square" lIns="0" tIns="25374" rIns="0" bIns="-25374" rtlCol="0" anchor="t"/>
+          <a:bodyPr wrap="square" lIns="0" tIns="17002" rIns="0" bIns="-17002" rtlCol="0" anchor="t"/>
           <a:lstStyle/>
           <a:p>
             <a:pPr algn="l" indent="0" marL="0">
@@ -9303,46 +9299,68 @@
               <a:buNone/>
             </a:pPr>
             <a:r>
-              <a:rPr lang="en-US" sz="3150" b="1" dirty="0" spc="3" kern="0">
-                <a:solidFill>
-                  <a:srgbClr val="F3EEE3"/>
-                </a:solidFill>
-                <a:latin typeface="Roboto Mono" pitchFamily="34" charset="0"/>
-                <a:ea typeface="Roboto Mono" pitchFamily="34" charset="-122"/>
-                <a:cs typeface="Roboto Mono" pitchFamily="34" charset="-120"/>
-              </a:rPr>
-              <a:t>{ sach</a:t>
-            </a:r>
-            <a:r>
-              <a:rPr lang="en-US" sz="3150" b="1" dirty="0" spc="2" kern="0">
-                <a:solidFill>
-                  <a:srgbClr val="F3EEE3"/>
-                </a:solidFill>
-                <a:latin typeface="Roboto Mono" pitchFamily="34" charset="0"/>
-                <a:ea typeface="Roboto Mono" pitchFamily="34" charset="-122"/>
-                <a:cs typeface="Roboto Mono" pitchFamily="34" charset="-120"/>
+              <a:rPr lang="en-US" sz="3150" b="1" dirty="0" spc="0" kern="0">
+                <a:solidFill>
+                  <a:srgbClr val="F3EEE3"/>
+                </a:solidFill>
+                <a:latin typeface="Be Vietnam Pro" pitchFamily="34" charset="0"/>
+                <a:ea typeface="Be Vietnam Pro" pitchFamily="34" charset="-122"/>
+                <a:cs typeface="Be Vietnam Pro" pitchFamily="34" charset="-120"/>
+              </a:rPr>
+              <a:t>{</a:t>
+            </a:r>
+            <a:r>
+              <a:rPr lang="en-US" sz="3150" b="1" dirty="0" spc="1" kern="0">
+                <a:solidFill>
+                  <a:srgbClr val="F3EEE3"/>
+                </a:solidFill>
+                <a:latin typeface="Be Vietnam Pro" pitchFamily="34" charset="0"/>
+                <a:ea typeface="Be Vietnam Pro" pitchFamily="34" charset="-122"/>
+                <a:cs typeface="Be Vietnam Pro" pitchFamily="34" charset="-120"/>
+              </a:rPr>
+              <a:t> sach</a:t>
+            </a:r>
+            <a:r>
+              <a:rPr lang="en-US" sz="3150" b="1" dirty="0" spc="-1" kern="0">
+                <a:solidFill>
+                  <a:srgbClr val="F3EEE3"/>
+                </a:solidFill>
+                <a:latin typeface="Be Vietnam Pro" pitchFamily="34" charset="0"/>
+                <a:ea typeface="Be Vietnam Pro" pitchFamily="34" charset="-122"/>
+                <a:cs typeface="Be Vietnam Pro" pitchFamily="34" charset="-120"/>
               </a:rPr>
               <a:t> {</a:t>
             </a:r>
             <a:r>
-              <a:rPr lang="en-US" sz="3150" b="1" dirty="0" spc="3" kern="0">
-                <a:solidFill>
-                  <a:srgbClr val="F3EEE3"/>
-                </a:solidFill>
-                <a:latin typeface="Roboto Mono" pitchFamily="34" charset="0"/>
-                <a:ea typeface="Roboto Mono" pitchFamily="34" charset="-122"/>
-                <a:cs typeface="Roboto Mono" pitchFamily="34" charset="-120"/>
-              </a:rPr>
-              <a:t> ten }</a:t>
-            </a:r>
-            <a:r>
-              <a:rPr lang="en-US" sz="3150" b="1" dirty="0" spc="2" kern="0">
-                <a:solidFill>
-                  <a:srgbClr val="F3EEE3"/>
-                </a:solidFill>
-                <a:latin typeface="Roboto Mono" pitchFamily="34" charset="0"/>
-                <a:ea typeface="Roboto Mono" pitchFamily="34" charset="-122"/>
-                <a:cs typeface="Roboto Mono" pitchFamily="34" charset="-120"/>
+              <a:rPr lang="en-US" sz="3150" b="1" dirty="0" spc="-12" kern="0">
+                <a:solidFill>
+                  <a:srgbClr val="F3EEE3"/>
+                </a:solidFill>
+                <a:latin typeface="Be Vietnam Pro" pitchFamily="34" charset="0"/>
+                <a:ea typeface="Be Vietnam Pro" pitchFamily="34" charset="-122"/>
+                <a:cs typeface="Be Vietnam Pro" pitchFamily="34" charset="-120"/>
+              </a:rPr>
+              <a:t> ten</a:t>
+            </a:r>
+            <a:r>
+              <a:rPr lang="en-US" sz="3150" b="1" dirty="0" spc="0" kern="0">
+                <a:solidFill>
+                  <a:srgbClr val="F3EEE3"/>
+                </a:solidFill>
+                <a:latin typeface="Be Vietnam Pro" pitchFamily="34" charset="0"/>
+                <a:ea typeface="Be Vietnam Pro" pitchFamily="34" charset="-122"/>
+                <a:cs typeface="Be Vietnam Pro" pitchFamily="34" charset="-120"/>
+              </a:rPr>
+              <a:t> }</a:t>
+            </a:r>
+            <a:r>
+              <a:rPr lang="en-US" sz="3150" b="1" dirty="0" spc="-1" kern="0">
+                <a:solidFill>
+                  <a:srgbClr val="F3EEE3"/>
+                </a:solidFill>
+                <a:latin typeface="Be Vietnam Pro" pitchFamily="34" charset="0"/>
+                <a:ea typeface="Be Vietnam Pro" pitchFamily="34" charset="-122"/>
+                <a:cs typeface="Be Vietnam Pro" pitchFamily="34" charset="-120"/>
               </a:rPr>
               <a:t> }</a:t>
             </a:r>
@@ -10691,13 +10709,13 @@
               <a:buNone/>
             </a:pPr>
             <a:r>
-              <a:rPr lang="en-US" sz="3300" b="1" dirty="0" spc="5" kern="0">
+              <a:rPr lang="en-US" sz="3300" b="1" dirty="0" spc="-2" kern="0">
                 <a:solidFill>
                   <a:srgbClr val="E8472B"/>
                 </a:solidFill>
-                <a:latin typeface="Roboto Mono" pitchFamily="34" charset="0"/>
-                <a:ea typeface="Roboto Mono" pitchFamily="34" charset="-122"/>
-                <a:cs typeface="Roboto Mono" pitchFamily="34" charset="-120"/>
+                <a:latin typeface="Be Vietnam Pro" pitchFamily="34" charset="0"/>
+                <a:ea typeface="Be Vietnam Pro" pitchFamily="34" charset="-122"/>
+                <a:cs typeface="Be Vietnam Pro" pitchFamily="34" charset="-120"/>
               </a:rPr>
               <a:t>giuSach(42)</a:t>
             </a:r>
